--- a/reports/soutenance/MBEUMI_Wilfried_SOUTENANCE.pptx
+++ b/reports/soutenance/MBEUMI_Wilfried_SOUTENANCE.pptx
@@ -4597,11 +4597,11 @@
         <p:spPr>
           <a:xfrm>
             <a:off x="822960" y="1920240"/>
-            <a:ext cx="3383280" cy="2377440"/>
+            <a:ext cx="3383280" cy="2103120"/>
           </a:xfrm>
           <a:prstGeom prst="roundRect">
             <a:avLst>
-              <a:gd name="adj" fmla="val 3077"/>
+              <a:gd name="adj" fmla="val 3478"/>
             </a:avLst>
           </a:prstGeom>
           <a:solidFill>
@@ -4623,7 +4623,7 @@
         </p:nvSpPr>
         <p:spPr>
           <a:xfrm>
-            <a:off x="822960" y="2331720"/>
+            <a:off x="822960" y="2286000"/>
             <a:ext cx="3383280" cy="868680"/>
           </a:xfrm>
           <a:prstGeom prst="rect">
@@ -4662,7 +4662,7 @@
         </p:nvSpPr>
         <p:spPr>
           <a:xfrm>
-            <a:off x="822960" y="3200400"/>
+            <a:off x="822960" y="3154680"/>
             <a:ext cx="3383280" cy="594360"/>
           </a:xfrm>
           <a:prstGeom prst="rect">
@@ -4719,11 +4719,11 @@
         <p:spPr>
           <a:xfrm>
             <a:off x="4407408" y="1920240"/>
-            <a:ext cx="3383280" cy="2377440"/>
+            <a:ext cx="3383280" cy="2103120"/>
           </a:xfrm>
           <a:prstGeom prst="roundRect">
             <a:avLst>
-              <a:gd name="adj" fmla="val 3077"/>
+              <a:gd name="adj" fmla="val 3478"/>
             </a:avLst>
           </a:prstGeom>
           <a:solidFill>
@@ -4745,7 +4745,7 @@
         </p:nvSpPr>
         <p:spPr>
           <a:xfrm>
-            <a:off x="4407408" y="2331720"/>
+            <a:off x="4407408" y="2286000"/>
             <a:ext cx="3383280" cy="868680"/>
           </a:xfrm>
           <a:prstGeom prst="rect">
@@ -4784,7 +4784,7 @@
         </p:nvSpPr>
         <p:spPr>
           <a:xfrm>
-            <a:off x="4407408" y="3200400"/>
+            <a:off x="4407408" y="3154680"/>
             <a:ext cx="3383280" cy="594360"/>
           </a:xfrm>
           <a:prstGeom prst="rect">
@@ -4841,11 +4841,11 @@
         <p:spPr>
           <a:xfrm>
             <a:off x="7991856" y="1920240"/>
-            <a:ext cx="3383280" cy="2377440"/>
+            <a:ext cx="3383280" cy="2103120"/>
           </a:xfrm>
           <a:prstGeom prst="roundRect">
             <a:avLst>
-              <a:gd name="adj" fmla="val 3077"/>
+              <a:gd name="adj" fmla="val 3478"/>
             </a:avLst>
           </a:prstGeom>
           <a:solidFill>
@@ -4867,7 +4867,7 @@
         </p:nvSpPr>
         <p:spPr>
           <a:xfrm>
-            <a:off x="7991856" y="2331720"/>
+            <a:off x="7991856" y="2286000"/>
             <a:ext cx="3383280" cy="868680"/>
           </a:xfrm>
           <a:prstGeom prst="rect">
@@ -4892,7 +4892,7 @@
                 <a:ea typeface="Cambria" pitchFamily="34" charset="-122"/>
                 <a:cs typeface="Cambria" pitchFamily="34" charset="-120"/>
               </a:rPr>
-              <a:t>2</a:t>
+              <a:t>0,753</a:t>
             </a:r>
             <a:endParaRPr lang="en-US" sz="4800" dirty="0"/>
           </a:p>
@@ -4906,7 +4906,7 @@
         </p:nvSpPr>
         <p:spPr>
           <a:xfrm>
-            <a:off x="7991856" y="3200400"/>
+            <a:off x="7991856" y="3154680"/>
             <a:ext cx="3383280" cy="594360"/>
           </a:xfrm>
           <a:prstGeom prst="rect">
@@ -4931,7 +4931,7 @@
                 <a:ea typeface="Calibri" pitchFamily="34" charset="-122"/>
                 <a:cs typeface="Calibri" pitchFamily="34" charset="-120"/>
               </a:rPr>
-              <a:t>langues (FR/EN), zéro fuite</a:t>
+              <a:t>AUC en validation externe sur</a:t>
             </a:r>
             <a:endParaRPr lang="en-US" sz="1250" dirty="0"/>
           </a:p>
@@ -4948,7 +4948,7 @@
                 <a:ea typeface="Calibri" pitchFamily="34" charset="-122"/>
                 <a:cs typeface="Calibri" pitchFamily="34" charset="-120"/>
               </a:rPr>
-              <a:t>de libellé vérifiée par test</a:t>
+              <a:t>base simulée, sans réentraînement</a:t>
             </a:r>
             <a:endParaRPr lang="en-US" sz="1250" dirty="0"/>
           </a:p>
@@ -4962,8 +4962,8 @@
         </p:nvSpPr>
         <p:spPr>
           <a:xfrm>
-            <a:off x="1097280" y="4754880"/>
-            <a:ext cx="10058400" cy="822960"/>
+            <a:off x="1097280" y="4343400"/>
+            <a:ext cx="10058400" cy="640080"/>
           </a:xfrm>
           <a:prstGeom prst="rect">
             <a:avLst/>
@@ -4979,7 +4979,7 @@
               <a:buNone/>
             </a:pPr>
             <a:r>
-              <a:rPr lang="en-US" sz="1450" dirty="0">
+              <a:rPr lang="en-US" sz="1400" dirty="0">
                 <a:solidFill>
                   <a:srgbClr val="8B99A8"/>
                 </a:solidFill>
@@ -4989,7 +4989,46 @@
               </a:rPr>
               <a:t>Tests d'intégration Streamlit (AppTest), tests E2E du cycle enregistrer → recharger → superviser, invariants d'import du moteur, pipeline ML reproductible en CI.</a:t>
             </a:r>
-            <a:endParaRPr lang="en-US" sz="1450" dirty="0"/>
+            <a:endParaRPr lang="en-US" sz="1400" dirty="0"/>
+          </a:p>
+        </p:txBody>
+      </p:sp>
+      <p:sp>
+        <p:nvSpPr>
+          <p:cNvPr id="14" name="Text 12"/>
+          <p:cNvSpPr/>
+          <p:nvPr/>
+        </p:nvSpPr>
+        <p:spPr>
+          <a:xfrm>
+            <a:off x="1097280" y="5029200"/>
+            <a:ext cx="10058400" cy="731520"/>
+          </a:xfrm>
+          <a:prstGeom prst="rect">
+            <a:avLst/>
+          </a:prstGeom>
+          <a:noFill/>
+          <a:ln/>
+        </p:spPr>
+        <p:txBody>
+          <a:bodyPr wrap="square" lIns="0" tIns="0" rIns="0" bIns="0" rtlCol="0" anchor="ctr"/>
+          <a:lstStyle/>
+          <a:p>
+            <a:pPr algn="ctr" indent="0" marL="0">
+              <a:buNone/>
+            </a:pPr>
+            <a:r>
+              <a:rPr lang="en-US" sz="1300" i="1" dirty="0">
+                <a:solidFill>
+                  <a:srgbClr val="8B99A8"/>
+                </a:solidFill>
+                <a:latin typeface="Calibri" pitchFamily="34" charset="0"/>
+                <a:ea typeface="Calibri" pitchFamily="34" charset="-122"/>
+                <a:cs typeface="Calibri" pitchFamily="34" charset="-120"/>
+              </a:rPr>
+              <a:t>Validation externe : 3 479 fenêtres issues de 15 runs simulés passées dans le même pipeline que le réel — résultat volontairement non optimisé, erreurs majoritairement conservatrices.</a:t>
+            </a:r>
+            <a:endParaRPr lang="en-US" sz="1300" dirty="0"/>
           </a:p>
         </p:txBody>
       </p:sp>

--- a/reports/soutenance/MBEUMI_Wilfried_SOUTENANCE.pptx
+++ b/reports/soutenance/MBEUMI_Wilfried_SOUTENANCE.pptx
@@ -4472,7 +4472,7 @@
                 <a:ea typeface="Calibri" pitchFamily="34" charset="-122"/>
                 <a:cs typeface="Calibri" pitchFamily="34" charset="-120"/>
               </a:rPr>
-              <a:t>694 tests automatisés en CI · veille scientifique (extrusion, SSB, ML industriel) alimentant l'état de l'art et les choix technologiques.</a:t>
+              <a:t>704 tests automatisés en CI · veille scientifique (extrusion, SSB, ML industriel) alimentant l'état de l'art et les choix technologiques.</a:t>
             </a:r>
             <a:endParaRPr lang="en-US" sz="1250" dirty="0"/>
           </a:p>
@@ -4648,7 +4648,7 @@
                 <a:ea typeface="Cambria" pitchFamily="34" charset="-122"/>
                 <a:cs typeface="Cambria" pitchFamily="34" charset="-120"/>
               </a:rPr>
-              <a:t>694</a:t>
+              <a:t>704</a:t>
             </a:r>
             <a:endParaRPr lang="en-US" sz="4800" dirty="0"/>
           </a:p>

--- a/reports/soutenance/MBEUMI_Wilfried_SOUTENANCE.pptx
+++ b/reports/soutenance/MBEUMI_Wilfried_SOUTENANCE.pptx
@@ -4472,7 +4472,7 @@
                 <a:ea typeface="Calibri" pitchFamily="34" charset="-122"/>
                 <a:cs typeface="Calibri" pitchFamily="34" charset="-120"/>
               </a:rPr>
-              <a:t>704 tests automatisés en CI · veille scientifique (extrusion, SSB, ML industriel) alimentant l'état de l'art et les choix technologiques.</a:t>
+              <a:t>705 tests automatisés en CI · veille scientifique (extrusion, SSB, ML industriel) alimentant l'état de l'art et les choix technologiques.</a:t>
             </a:r>
             <a:endParaRPr lang="en-US" sz="1250" dirty="0"/>
           </a:p>
@@ -4648,7 +4648,7 @@
                 <a:ea typeface="Cambria" pitchFamily="34" charset="-122"/>
                 <a:cs typeface="Cambria" pitchFamily="34" charset="-120"/>
               </a:rPr>
-              <a:t>704</a:t>
+              <a:t>705</a:t>
             </a:r>
             <a:endParaRPr lang="en-US" sz="4800" dirty="0"/>
           </a:p>

--- a/reports/soutenance/MBEUMI_Wilfried_SOUTENANCE.pptx
+++ b/reports/soutenance/MBEUMI_Wilfried_SOUTENANCE.pptx
@@ -3076,7 +3076,7 @@
                 <a:ea typeface="Calibri" pitchFamily="34" charset="-122"/>
                 <a:cs typeface="Calibri" pitchFamily="34" charset="-120"/>
               </a:rPr>
-              <a:t>6 pages, bilingue FR/EN, persistance 3 couches (édition → validé → historique)</a:t>
+              <a:t>7 pages, accès protégé, bilingue FR/EN, persistance 3 couches (édition → validé → historique)</a:t>
             </a:r>
             <a:endParaRPr lang="en-US" sz="1300" dirty="0"/>
           </a:p>
@@ -3090,12 +3090,12 @@
         </p:nvSpPr>
         <p:spPr>
           <a:xfrm>
-            <a:off x="548640" y="1828800"/>
-            <a:ext cx="3566160" cy="1965960"/>
+            <a:off x="548640" y="1874520"/>
+            <a:ext cx="2606040" cy="1993392"/>
           </a:xfrm>
           <a:prstGeom prst="roundRect">
             <a:avLst>
-              <a:gd name="adj" fmla="val 3721"/>
+              <a:gd name="adj" fmla="val 3670"/>
             </a:avLst>
           </a:prstGeom>
           <a:solidFill>
@@ -3117,8 +3117,8 @@
         </p:nvSpPr>
         <p:spPr>
           <a:xfrm>
-            <a:off x="822960" y="2029968"/>
-            <a:ext cx="3017520" cy="365760"/>
+            <a:off x="749808" y="2039112"/>
+            <a:ext cx="2240280" cy="384048"/>
           </a:xfrm>
           <a:prstGeom prst="rect">
             <a:avLst/>
@@ -3134,7 +3134,7 @@
               <a:buNone/>
             </a:pPr>
             <a:r>
-              <a:rPr lang="en-US" sz="1550" b="1" dirty="0">
+              <a:rPr lang="en-US" sz="1350" b="1" dirty="0">
                 <a:solidFill>
                   <a:srgbClr val="2DD4BF"/>
                 </a:solidFill>
@@ -3144,7 +3144,7 @@
               </a:rPr>
               <a:t>Supervision</a:t>
             </a:r>
-            <a:endParaRPr lang="en-US" sz="1550" dirty="0"/>
+            <a:endParaRPr lang="en-US" sz="1350" dirty="0"/>
           </a:p>
         </p:txBody>
       </p:sp>
@@ -3156,8 +3156,8 @@
         </p:nvSpPr>
         <p:spPr>
           <a:xfrm>
-            <a:off x="822960" y="2450592"/>
-            <a:ext cx="3063240" cy="1234440"/>
+            <a:off x="749808" y="2459736"/>
+            <a:ext cx="2240280" cy="1298448"/>
           </a:xfrm>
           <a:prstGeom prst="rect">
             <a:avLst/>
@@ -3173,7 +3173,7 @@
               <a:buNone/>
             </a:pPr>
             <a:r>
-              <a:rPr lang="en-US" sz="1250" dirty="0">
+              <a:rPr lang="en-US" sz="1100" dirty="0">
                 <a:solidFill>
                   <a:srgbClr val="EAF2F4"/>
                 </a:solidFill>
@@ -3183,7 +3183,7 @@
               </a:rPr>
               <a:t>score de stabilité ML, probabilité de dérive, alertes et recommandations IA en direct</a:t>
             </a:r>
-            <a:endParaRPr lang="en-US" sz="1250" dirty="0"/>
+            <a:endParaRPr lang="en-US" sz="1100" dirty="0"/>
           </a:p>
         </p:txBody>
       </p:sp>
@@ -3195,12 +3195,12 @@
         </p:nvSpPr>
         <p:spPr>
           <a:xfrm>
-            <a:off x="4370832" y="1828800"/>
-            <a:ext cx="3566160" cy="1965960"/>
+            <a:off x="3364992" y="1874520"/>
+            <a:ext cx="2606040" cy="1993392"/>
           </a:xfrm>
           <a:prstGeom prst="roundRect">
             <a:avLst>
-              <a:gd name="adj" fmla="val 3721"/>
+              <a:gd name="adj" fmla="val 3670"/>
             </a:avLst>
           </a:prstGeom>
           <a:solidFill>
@@ -3222,8 +3222,8 @@
         </p:nvSpPr>
         <p:spPr>
           <a:xfrm>
-            <a:off x="4645152" y="2029968"/>
-            <a:ext cx="3017520" cy="365760"/>
+            <a:off x="3566160" y="2039112"/>
+            <a:ext cx="2240280" cy="384048"/>
           </a:xfrm>
           <a:prstGeom prst="rect">
             <a:avLst/>
@@ -3239,7 +3239,7 @@
               <a:buNone/>
             </a:pPr>
             <a:r>
-              <a:rPr lang="en-US" sz="1550" b="1" dirty="0">
+              <a:rPr lang="en-US" sz="1350" b="1" dirty="0">
                 <a:solidFill>
                   <a:srgbClr val="2DD4BF"/>
                 </a:solidFill>
@@ -3249,7 +3249,7 @@
               </a:rPr>
               <a:t>Configuration vis</a:t>
             </a:r>
-            <a:endParaRPr lang="en-US" sz="1550" dirty="0"/>
+            <a:endParaRPr lang="en-US" sz="1350" dirty="0"/>
           </a:p>
         </p:txBody>
       </p:sp>
@@ -3261,8 +3261,8 @@
         </p:nvSpPr>
         <p:spPr>
           <a:xfrm>
-            <a:off x="4645152" y="2450592"/>
-            <a:ext cx="3063240" cy="1234440"/>
+            <a:off x="3566160" y="2459736"/>
+            <a:ext cx="2240280" cy="1298448"/>
           </a:xfrm>
           <a:prstGeom prst="rect">
             <a:avLst/>
@@ -3278,7 +3278,7 @@
               <a:buNone/>
             </a:pPr>
             <a:r>
-              <a:rPr lang="en-US" sz="1250" dirty="0">
+              <a:rPr lang="en-US" sz="1100" dirty="0">
                 <a:solidFill>
                   <a:srgbClr val="EAF2F4"/>
                 </a:solidFill>
@@ -3288,7 +3288,7 @@
               </a:rPr>
               <a:t>construction du profil 81 positions, KPIs procédé recalculés à chaque geste</a:t>
             </a:r>
-            <a:endParaRPr lang="en-US" sz="1250" dirty="0"/>
+            <a:endParaRPr lang="en-US" sz="1100" dirty="0"/>
           </a:p>
         </p:txBody>
       </p:sp>
@@ -3300,12 +3300,12 @@
         </p:nvSpPr>
         <p:spPr>
           <a:xfrm>
-            <a:off x="8193024" y="1828800"/>
-            <a:ext cx="3566160" cy="1965960"/>
+            <a:off x="6181344" y="1874520"/>
+            <a:ext cx="2606040" cy="1993392"/>
           </a:xfrm>
           <a:prstGeom prst="roundRect">
             <a:avLst>
-              <a:gd name="adj" fmla="val 3721"/>
+              <a:gd name="adj" fmla="val 3670"/>
             </a:avLst>
           </a:prstGeom>
           <a:solidFill>
@@ -3327,8 +3327,8 @@
         </p:nvSpPr>
         <p:spPr>
           <a:xfrm>
-            <a:off x="8467344" y="2029968"/>
-            <a:ext cx="3017520" cy="365760"/>
+            <a:off x="6382512" y="2039112"/>
+            <a:ext cx="2240280" cy="384048"/>
           </a:xfrm>
           <a:prstGeom prst="rect">
             <a:avLst/>
@@ -3344,7 +3344,7 @@
               <a:buNone/>
             </a:pPr>
             <a:r>
-              <a:rPr lang="en-US" sz="1550" b="1" dirty="0">
+              <a:rPr lang="en-US" sz="1350" b="1" dirty="0">
                 <a:solidFill>
                   <a:srgbClr val="2DD4BF"/>
                 </a:solidFill>
@@ -3354,7 +3354,7 @@
               </a:rPr>
               <a:t>Paramètres IA &amp; feeders</a:t>
             </a:r>
-            <a:endParaRPr lang="en-US" sz="1550" dirty="0"/>
+            <a:endParaRPr lang="en-US" sz="1350" dirty="0"/>
           </a:p>
         </p:txBody>
       </p:sp>
@@ -3366,8 +3366,8 @@
         </p:nvSpPr>
         <p:spPr>
           <a:xfrm>
-            <a:off x="8467344" y="2450592"/>
-            <a:ext cx="3063240" cy="1234440"/>
+            <a:off x="6382512" y="2459736"/>
+            <a:ext cx="2240280" cy="1298448"/>
           </a:xfrm>
           <a:prstGeom prst="rect">
             <a:avLst/>
@@ -3383,7 +3383,7 @@
               <a:buNone/>
             </a:pPr>
             <a:r>
-              <a:rPr lang="en-US" sz="1250" dirty="0">
+              <a:rPr lang="en-US" sz="1100" dirty="0">
                 <a:solidFill>
                   <a:srgbClr val="EAF2F4"/>
                 </a:solidFill>
@@ -3393,7 +3393,7 @@
               </a:rPr>
               <a:t>seuils, matières, calibration doseurs — rien n'impacte la supervision avant validation</a:t>
             </a:r>
-            <a:endParaRPr lang="en-US" sz="1250" dirty="0"/>
+            <a:endParaRPr lang="en-US" sz="1100" dirty="0"/>
           </a:p>
         </p:txBody>
       </p:sp>
@@ -3405,12 +3405,12 @@
         </p:nvSpPr>
         <p:spPr>
           <a:xfrm>
-            <a:off x="548640" y="4023360"/>
-            <a:ext cx="3566160" cy="1965960"/>
+            <a:off x="8997696" y="1874520"/>
+            <a:ext cx="2606040" cy="1993392"/>
           </a:xfrm>
           <a:prstGeom prst="roundRect">
             <a:avLst>
-              <a:gd name="adj" fmla="val 3721"/>
+              <a:gd name="adj" fmla="val 3670"/>
             </a:avLst>
           </a:prstGeom>
           <a:solidFill>
@@ -3432,8 +3432,8 @@
         </p:nvSpPr>
         <p:spPr>
           <a:xfrm>
-            <a:off x="822960" y="4224528"/>
-            <a:ext cx="3017520" cy="365760"/>
+            <a:off x="9198864" y="2039112"/>
+            <a:ext cx="2240280" cy="384048"/>
           </a:xfrm>
           <a:prstGeom prst="rect">
             <a:avLst/>
@@ -3449,7 +3449,7 @@
               <a:buNone/>
             </a:pPr>
             <a:r>
-              <a:rPr lang="en-US" sz="1550" b="1" dirty="0">
+              <a:rPr lang="en-US" sz="1350" b="1" dirty="0">
                 <a:solidFill>
                   <a:srgbClr val="2DD4BF"/>
                 </a:solidFill>
@@ -3459,7 +3459,7 @@
               </a:rPr>
               <a:t>Analyse de run</a:t>
             </a:r>
-            <a:endParaRPr lang="en-US" sz="1550" dirty="0"/>
+            <a:endParaRPr lang="en-US" sz="1350" dirty="0"/>
           </a:p>
         </p:txBody>
       </p:sp>
@@ -3471,8 +3471,8 @@
         </p:nvSpPr>
         <p:spPr>
           <a:xfrm>
-            <a:off x="822960" y="4645152"/>
-            <a:ext cx="3063240" cy="1234440"/>
+            <a:off x="9198864" y="2459736"/>
+            <a:ext cx="2240280" cy="1298448"/>
           </a:xfrm>
           <a:prstGeom prst="rect">
             <a:avLst/>
@@ -3488,7 +3488,7 @@
               <a:buNone/>
             </a:pPr>
             <a:r>
-              <a:rPr lang="en-US" sz="1250" dirty="0">
+              <a:rPr lang="en-US" sz="1100" dirty="0">
                 <a:solidFill>
                   <a:srgbClr val="EAF2F4"/>
                 </a:solidFill>
@@ -3498,7 +3498,7 @@
               </a:rPr>
               <a:t>relecture temporelle d'une production : fenêtres, score, profil thermique</a:t>
             </a:r>
-            <a:endParaRPr lang="en-US" sz="1250" dirty="0"/>
+            <a:endParaRPr lang="en-US" sz="1100" dirty="0"/>
           </a:p>
         </p:txBody>
       </p:sp>
@@ -3510,12 +3510,12 @@
         </p:nvSpPr>
         <p:spPr>
           <a:xfrm>
-            <a:off x="4370832" y="4023360"/>
-            <a:ext cx="3566160" cy="1965960"/>
+            <a:off x="548640" y="4087368"/>
+            <a:ext cx="2606040" cy="1993392"/>
           </a:xfrm>
           <a:prstGeom prst="roundRect">
             <a:avLst>
-              <a:gd name="adj" fmla="val 3721"/>
+              <a:gd name="adj" fmla="val 3670"/>
             </a:avLst>
           </a:prstGeom>
           <a:solidFill>
@@ -3537,8 +3537,8 @@
         </p:nvSpPr>
         <p:spPr>
           <a:xfrm>
-            <a:off x="4645152" y="4224528"/>
-            <a:ext cx="3017520" cy="365760"/>
+            <a:off x="749808" y="4251960"/>
+            <a:ext cx="2240280" cy="384048"/>
           </a:xfrm>
           <a:prstGeom prst="rect">
             <a:avLst/>
@@ -3554,7 +3554,7 @@
               <a:buNone/>
             </a:pPr>
             <a:r>
-              <a:rPr lang="en-US" sz="1550" b="1" dirty="0">
+              <a:rPr lang="en-US" sz="1350" b="1" dirty="0">
                 <a:solidFill>
                   <a:srgbClr val="2DD4BF"/>
                 </a:solidFill>
@@ -3564,7 +3564,7 @@
               </a:rPr>
               <a:t>Historique</a:t>
             </a:r>
-            <a:endParaRPr lang="en-US" sz="1550" dirty="0"/>
+            <a:endParaRPr lang="en-US" sz="1350" dirty="0"/>
           </a:p>
         </p:txBody>
       </p:sp>
@@ -3576,8 +3576,8 @@
         </p:nvSpPr>
         <p:spPr>
           <a:xfrm>
-            <a:off x="4645152" y="4645152"/>
-            <a:ext cx="3063240" cy="1234440"/>
+            <a:off x="749808" y="4672584"/>
+            <a:ext cx="2240280" cy="1298448"/>
           </a:xfrm>
           <a:prstGeom prst="rect">
             <a:avLst/>
@@ -3593,7 +3593,7 @@
               <a:buNone/>
             </a:pPr>
             <a:r>
-              <a:rPr lang="en-US" sz="1250" dirty="0">
+              <a:rPr lang="en-US" sz="1100" dirty="0">
                 <a:solidFill>
                   <a:srgbClr val="EAF2F4"/>
                 </a:solidFill>
@@ -3603,7 +3603,7 @@
               </a:rPr>
               <a:t>chaque configuration validée est figée avec ses KPIs — traçabilité R&amp;D</a:t>
             </a:r>
-            <a:endParaRPr lang="en-US" sz="1250" dirty="0"/>
+            <a:endParaRPr lang="en-US" sz="1100" dirty="0"/>
           </a:p>
         </p:txBody>
       </p:sp>
@@ -3615,12 +3615,12 @@
         </p:nvSpPr>
         <p:spPr>
           <a:xfrm>
-            <a:off x="8193024" y="4023360"/>
-            <a:ext cx="3566160" cy="1965960"/>
+            <a:off x="3364992" y="4087368"/>
+            <a:ext cx="2606040" cy="1993392"/>
           </a:xfrm>
           <a:prstGeom prst="roundRect">
             <a:avLst>
-              <a:gd name="adj" fmla="val 3721"/>
+              <a:gd name="adj" fmla="val 3670"/>
             </a:avLst>
           </a:prstGeom>
           <a:solidFill>
@@ -3642,8 +3642,8 @@
         </p:nvSpPr>
         <p:spPr>
           <a:xfrm>
-            <a:off x="8467344" y="4224528"/>
-            <a:ext cx="3017520" cy="365760"/>
+            <a:off x="3566160" y="4251960"/>
+            <a:ext cx="2240280" cy="384048"/>
           </a:xfrm>
           <a:prstGeom prst="rect">
             <a:avLst/>
@@ -3659,7 +3659,7 @@
               <a:buNone/>
             </a:pPr>
             <a:r>
-              <a:rPr lang="en-US" sz="1550" b="1" dirty="0">
+              <a:rPr lang="en-US" sz="1350" b="1" dirty="0">
                 <a:solidFill>
                   <a:srgbClr val="2DD4BF"/>
                 </a:solidFill>
@@ -3669,7 +3669,7 @@
               </a:rPr>
               <a:t>Moteur procédé</a:t>
             </a:r>
-            <a:endParaRPr lang="en-US" sz="1550" dirty="0"/>
+            <a:endParaRPr lang="en-US" sz="1350" dirty="0"/>
           </a:p>
         </p:txBody>
       </p:sp>
@@ -3681,8 +3681,8 @@
         </p:nvSpPr>
         <p:spPr>
           <a:xfrm>
-            <a:off x="8467344" y="4645152"/>
-            <a:ext cx="3063240" cy="1234440"/>
+            <a:off x="3566160" y="4672584"/>
+            <a:ext cx="2240280" cy="1298448"/>
           </a:xfrm>
           <a:prstGeom prst="rect">
             <a:avLst/>
@@ -3698,7 +3698,7 @@
               <a:buNone/>
             </a:pPr>
             <a:r>
-              <a:rPr lang="en-US" sz="1250" dirty="0">
+              <a:rPr lang="en-US" sz="1100" dirty="0">
                 <a:solidFill>
                   <a:srgbClr val="EAF2F4"/>
                 </a:solidFill>
@@ -3708,7 +3708,112 @@
               </a:rPr>
               <a:t>vue transparente de la physique : chaque nombre affiché est justifiable</a:t>
             </a:r>
-            <a:endParaRPr lang="en-US" sz="1250" dirty="0"/>
+            <a:endParaRPr lang="en-US" sz="1100" dirty="0"/>
+          </a:p>
+        </p:txBody>
+      </p:sp>
+      <p:sp>
+        <p:nvSpPr>
+          <p:cNvPr id="22" name="Shape 20"/>
+          <p:cNvSpPr/>
+          <p:nvPr/>
+        </p:nvSpPr>
+        <p:spPr>
+          <a:xfrm>
+            <a:off x="6181344" y="4087368"/>
+            <a:ext cx="2606040" cy="1993392"/>
+          </a:xfrm>
+          <a:prstGeom prst="roundRect">
+            <a:avLst>
+              <a:gd name="adj" fmla="val 3670"/>
+            </a:avLst>
+          </a:prstGeom>
+          <a:solidFill>
+            <a:srgbClr val="1C232E"/>
+          </a:solidFill>
+          <a:ln w="9525">
+            <a:solidFill>
+              <a:srgbClr val="2A3442"/>
+            </a:solidFill>
+            <a:prstDash val="solid"/>
+          </a:ln>
+        </p:spPr>
+      </p:sp>
+      <p:sp>
+        <p:nvSpPr>
+          <p:cNvPr id="23" name="Text 21"/>
+          <p:cNvSpPr/>
+          <p:nvPr/>
+        </p:nvSpPr>
+        <p:spPr>
+          <a:xfrm>
+            <a:off x="6382512" y="4251960"/>
+            <a:ext cx="2240280" cy="384048"/>
+          </a:xfrm>
+          <a:prstGeom prst="rect">
+            <a:avLst/>
+          </a:prstGeom>
+          <a:noFill/>
+          <a:ln/>
+        </p:spPr>
+        <p:txBody>
+          <a:bodyPr wrap="square" lIns="0" tIns="0" rIns="0" bIns="0" rtlCol="0" anchor="ctr"/>
+          <a:lstStyle/>
+          <a:p>
+            <a:pPr indent="0" marL="0">
+              <a:buNone/>
+            </a:pPr>
+            <a:r>
+              <a:rPr lang="en-US" sz="1350" b="1" dirty="0">
+                <a:solidFill>
+                  <a:srgbClr val="2DD4BF"/>
+                </a:solidFill>
+                <a:latin typeface="Calibri" pitchFamily="34" charset="0"/>
+                <a:ea typeface="Calibri" pitchFamily="34" charset="-122"/>
+                <a:cs typeface="Calibri" pitchFamily="34" charset="-120"/>
+              </a:rPr>
+              <a:t>Compte &amp; accès</a:t>
+            </a:r>
+            <a:endParaRPr lang="en-US" sz="1350" dirty="0"/>
+          </a:p>
+        </p:txBody>
+      </p:sp>
+      <p:sp>
+        <p:nvSpPr>
+          <p:cNvPr id="24" name="Text 22"/>
+          <p:cNvSpPr/>
+          <p:nvPr/>
+        </p:nvSpPr>
+        <p:spPr>
+          <a:xfrm>
+            <a:off x="6382512" y="4672584"/>
+            <a:ext cx="2240280" cy="1298448"/>
+          </a:xfrm>
+          <a:prstGeom prst="rect">
+            <a:avLst/>
+          </a:prstGeom>
+          <a:noFill/>
+          <a:ln/>
+        </p:spPr>
+        <p:txBody>
+          <a:bodyPr wrap="square" lIns="0" tIns="0" rIns="0" bIns="0" rtlCol="0" anchor="ctr"/>
+          <a:lstStyle/>
+          <a:p>
+            <a:pPr indent="0" marL="0">
+              <a:buNone/>
+            </a:pPr>
+            <a:r>
+              <a:rPr lang="en-US" sz="1100" dirty="0">
+                <a:solidFill>
+                  <a:srgbClr val="EAF2F4"/>
+                </a:solidFill>
+                <a:latin typeface="Calibri" pitchFamily="34" charset="0"/>
+                <a:ea typeface="Calibri" pitchFamily="34" charset="-122"/>
+                <a:cs typeface="Calibri" pitchFamily="34" charset="-120"/>
+              </a:rPr>
+              <a:t>connexion requise (mot de passe haché PBKDF2) et historique des connexions lu en base</a:t>
+            </a:r>
+            <a:endParaRPr lang="en-US" sz="1100" dirty="0"/>
           </a:p>
         </p:txBody>
       </p:sp>
@@ -6778,7 +6883,7 @@
                 <a:ea typeface="Calibri" pitchFamily="34" charset="-122"/>
                 <a:cs typeface="Calibri" pitchFamily="34" charset="-120"/>
               </a:rPr>
-              <a:t>Supervision · Configuration vis · Paramètres IA · Analyse de run · Historique · Moteur procédé</a:t>
+              <a:t>Supervision · Configuration vis · Paramètres IA · Analyse de run · Historique · Moteur procédé · Compte</a:t>
             </a:r>
             <a:endParaRPr lang="en-US" sz="1250" dirty="0"/>
           </a:p>

--- a/reports/soutenance/MBEUMI_Wilfried_SOUTENANCE.pptx
+++ b/reports/soutenance/MBEUMI_Wilfried_SOUTENANCE.pptx
@@ -4046,7 +4046,7 @@
                 <a:ea typeface="Calibri" pitchFamily="34" charset="-122"/>
                 <a:cs typeface="Calibri" pitchFamily="34" charset="-120"/>
               </a:rPr>
-              <a:t>Méthode</a:t>
+              <a:t>Méthode : Kanban</a:t>
             </a:r>
             <a:endParaRPr lang="en-US" sz="1650" dirty="0"/>
           </a:p>
@@ -4085,7 +4085,7 @@
                 <a:ea typeface="Calibri" pitchFamily="34" charset="-122"/>
                 <a:cs typeface="Calibri" pitchFamily="34" charset="-120"/>
               </a:rPr>
-              <a:t>Itérations courtes type agile : proposition → validation encadrant → développement → tests → démo. Chaque brique validée avant la suivante.</a:t>
+              <a:t>Flux tiré à encours limité (WIP=1) : proposition → validation encadrant → développement → tests → démo. Aucune brique entamée avant la validation de la précédente.</a:t>
             </a:r>
             <a:endParaRPr lang="en-US" sz="1250" dirty="0"/>
           </a:p>
